--- a/TSLA_Implied_Volatility_Surface_Presentation.pptx
+++ b/TSLA_Implied_Volatility_Surface_Presentation.pptx
@@ -6001,7 +6001,7 @@
                   <a:srgbClr val="1B2A4A"/>
                 </a:solidFill>
               </a:rPr>
-              <a:t>Event Study: TSLA 5-for-1 Stock Split (Aug 2020) — Smile flipped from put-skew to call-skew as retail FOMO peaked</a:t>
+              <a:t>Event Study: TSLA 5-for-1 Stock Split (Aug 2020) — Put-call skew compressed to its narrowest point (+3.5 vol pts) as retail FOMO peaked — but never inverted</a:t>
             </a:r>
           </a:p>
         </p:txBody>
